--- a/Slides/Representation/Pose_Representation_01.pptx
+++ b/Slides/Representation/Pose_Representation_01.pptx
@@ -9227,10 +9227,133 @@
         </p:nvSpPr>
         <p:spPr/>
         <p:txBody>
-          <a:bodyPr/>
+          <a:bodyPr>
+            <a:normAutofit fontScale="25000" lnSpcReduction="20000"/>
+          </a:bodyPr>
           <a:lstStyle/>
           <a:p>
-            <a:endParaRPr lang="en-US"/>
+            <a:r>
+              <a:rPr lang="en-US" dirty="0"/>
+              <a:t>What is representation</a:t>
+            </a:r>
+          </a:p>
+          <a:p>
+            <a:r>
+              <a:rPr lang="en-US" dirty="0"/>
+              <a:t>The frame transform - frame rotation model</a:t>
+            </a:r>
+          </a:p>
+          <a:p>
+            <a:r>
+              <a:rPr lang="en-US" dirty="0"/>
+              <a:t>Local frames and global (geo) frames</a:t>
+            </a:r>
+          </a:p>
+          <a:p>
+            <a:r>
+              <a:rPr lang="en-US" dirty="0"/>
+              <a:t>Problem: many ways to specify frame transforms</a:t>
+            </a:r>
+          </a:p>
+          <a:p>
+            <a:r>
+              <a:rPr lang="en-US" dirty="0"/>
+              <a:t>Using components to represent poses</a:t>
+            </a:r>
+          </a:p>
+          <a:p>
+            <a:r>
+              <a:rPr lang="en-US" dirty="0"/>
+              <a:t>Local frame</a:t>
+            </a:r>
+          </a:p>
+          <a:p>
+            <a:r>
+              <a:rPr lang="en-US" dirty="0"/>
+              <a:t>Geo frame basic=</a:t>
+            </a:r>
+            <a:r>
+              <a:rPr lang="en-US" dirty="0" err="1"/>
+              <a:t>ypr</a:t>
+            </a:r>
+            <a:endParaRPr lang="en-US" dirty="0"/>
+          </a:p>
+          <a:p>
+            <a:r>
+              <a:rPr lang="en-US" dirty="0"/>
+              <a:t>What components support frame transforms?</a:t>
+            </a:r>
+          </a:p>
+          <a:p>
+            <a:r>
+              <a:rPr lang="en-US" dirty="0"/>
+              <a:t>What components support frame rotations</a:t>
+            </a:r>
+          </a:p>
+          <a:p>
+            <a:r>
+              <a:rPr lang="en-US" dirty="0"/>
+              <a:t>Uncertainty</a:t>
+            </a:r>
+          </a:p>
+          <a:p>
+            <a:r>
+              <a:rPr lang="en-US" dirty="0"/>
+              <a:t>Decorations</a:t>
+            </a:r>
+          </a:p>
+          <a:p>
+            <a:r>
+              <a:rPr lang="en-US" dirty="0"/>
+              <a:t>Type</a:t>
+            </a:r>
+          </a:p>
+          <a:p>
+            <a:r>
+              <a:rPr lang="en-US" dirty="0"/>
+              <a:t>Time</a:t>
+            </a:r>
+          </a:p>
+          <a:p>
+            <a:r>
+              <a:rPr lang="en-US" dirty="0"/>
+              <a:t>ID</a:t>
+            </a:r>
+          </a:p>
+          <a:p>
+            <a:r>
+              <a:rPr lang="en-US" dirty="0"/>
+              <a:t>Links</a:t>
+            </a:r>
+          </a:p>
+          <a:p>
+            <a:r>
+              <a:rPr lang="en-US" dirty="0"/>
+              <a:t>Recap of Components</a:t>
+            </a:r>
+          </a:p>
+          <a:p>
+            <a:r>
+              <a:rPr lang="en-US" dirty="0"/>
+              <a:t>Recap of Basic </a:t>
+            </a:r>
+            <a:r>
+              <a:rPr lang="en-US"/>
+              <a:t>GeoPoses</a:t>
+            </a:r>
+            <a:endParaRPr lang="en-US" dirty="0"/>
+          </a:p>
+          <a:p>
+            <a:r>
+              <a:rPr lang="en-US" dirty="0"/>
+              <a:t>Machine Perception</a:t>
+            </a:r>
+          </a:p>
+          <a:p>
+            <a:endParaRPr lang="en-US" dirty="0"/>
+          </a:p>
+          <a:p>
+            <a:endParaRPr lang="en-US" dirty="0"/>
           </a:p>
         </p:txBody>
       </p:sp>
